--- a/portal/templates/blank.pptx
+++ b/portal/templates/blank.pptx
@@ -518,8 +518,8 @@
           <a:lstStyle/>
           <a:p>
             <a:endParaRPr lang="en-US" dirty="0">
-              <a:latin typeface="Christian Sans" panose="020B0604020202020204" pitchFamily="34" charset="0"/>
-              <a:cs typeface="Christian Sans" panose="020B0604020202020204" pitchFamily="34" charset="0"/>
+              <a:latin typeface="Novus Serif" panose="020B0604020202020204" pitchFamily="34" charset="0"/>
+              <a:cs typeface="Novus Serif" panose="020B0604020202020204" pitchFamily="34" charset="0"/>
             </a:endParaRPr>
           </a:p>
         </p:txBody>
@@ -3149,7 +3149,7 @@
         <a:spcBef>
           <a:spcPts val="1000"/>
         </a:spcBef>
-        <a:buFont typeface="Christian Sans" panose="020B0604020202020204" pitchFamily="34" charset="0"/>
+        <a:buFont typeface="Novus Serif" panose="020B0604020202020204" pitchFamily="34" charset="0"/>
         <a:buChar char="•"/>
         <a:defRPr sz="2800" kern="1200">
           <a:solidFill>
@@ -3167,7 +3167,7 @@
         <a:spcBef>
           <a:spcPts val="500"/>
         </a:spcBef>
-        <a:buFont typeface="Christian Sans" panose="020B0604020202020204" pitchFamily="34" charset="0"/>
+        <a:buFont typeface="Novus Serif" panose="020B0604020202020204" pitchFamily="34" charset="0"/>
         <a:buChar char="•"/>
         <a:defRPr sz="2400" kern="1200">
           <a:solidFill>
@@ -3185,7 +3185,7 @@
         <a:spcBef>
           <a:spcPts val="500"/>
         </a:spcBef>
-        <a:buFont typeface="Christian Sans" panose="020B0604020202020204" pitchFamily="34" charset="0"/>
+        <a:buFont typeface="Novus Serif" panose="020B0604020202020204" pitchFamily="34" charset="0"/>
         <a:buChar char="•"/>
         <a:defRPr sz="2000" kern="1200">
           <a:solidFill>
@@ -3203,7 +3203,7 @@
         <a:spcBef>
           <a:spcPts val="500"/>
         </a:spcBef>
-        <a:buFont typeface="Christian Sans" panose="020B0604020202020204" pitchFamily="34" charset="0"/>
+        <a:buFont typeface="Novus Serif" panose="020B0604020202020204" pitchFamily="34" charset="0"/>
         <a:buChar char="•"/>
         <a:defRPr sz="1800" kern="1200">
           <a:solidFill>
@@ -3221,7 +3221,7 @@
         <a:spcBef>
           <a:spcPts val="500"/>
         </a:spcBef>
-        <a:buFont typeface="Christian Sans" panose="020B0604020202020204" pitchFamily="34" charset="0"/>
+        <a:buFont typeface="Novus Serif" panose="020B0604020202020204" pitchFamily="34" charset="0"/>
         <a:buChar char="•"/>
         <a:defRPr sz="1800" kern="1200">
           <a:solidFill>
@@ -3239,7 +3239,7 @@
         <a:spcBef>
           <a:spcPts val="500"/>
         </a:spcBef>
-        <a:buFont typeface="Christian Sans" panose="020B0604020202020204" pitchFamily="34" charset="0"/>
+        <a:buFont typeface="Novus Serif" panose="020B0604020202020204" pitchFamily="34" charset="0"/>
         <a:buChar char="•"/>
         <a:defRPr sz="1800" kern="1200">
           <a:solidFill>
@@ -3257,7 +3257,7 @@
         <a:spcBef>
           <a:spcPts val="500"/>
         </a:spcBef>
-        <a:buFont typeface="Christian Sans" panose="020B0604020202020204" pitchFamily="34" charset="0"/>
+        <a:buFont typeface="Novus Serif" panose="020B0604020202020204" pitchFamily="34" charset="0"/>
         <a:buChar char="•"/>
         <a:defRPr sz="1800" kern="1200">
           <a:solidFill>
@@ -3275,7 +3275,7 @@
         <a:spcBef>
           <a:spcPts val="500"/>
         </a:spcBef>
-        <a:buFont typeface="Christian Sans" panose="020B0604020202020204" pitchFamily="34" charset="0"/>
+        <a:buFont typeface="Novus Serif" panose="020B0604020202020204" pitchFamily="34" charset="0"/>
         <a:buChar char="•"/>
         <a:defRPr sz="1800" kern="1200">
           <a:solidFill>
@@ -3293,7 +3293,7 @@
         <a:spcBef>
           <a:spcPts val="500"/>
         </a:spcBef>
-        <a:buFont typeface="Christian Sans" panose="020B0604020202020204" pitchFamily="34" charset="0"/>
+        <a:buFont typeface="Novus Serif" panose="020B0604020202020204" pitchFamily="34" charset="0"/>
         <a:buChar char="•"/>
         <a:defRPr sz="1800" kern="1200">
           <a:solidFill>
@@ -3515,15 +3515,15 @@
     </a:clrScheme>
     <a:fontScheme name="Office Theme">
       <a:majorFont>
-        <a:latin typeface="Christian Sans" panose="020F0302020204030204"/>
+        <a:latin typeface="Novus Serif" panose="020F0302020204030204"/>
         <a:ea typeface=""/>
         <a:cs typeface=""/>
         <a:font script="Jpan" typeface="ＭＳ Ｐゴシック"/>
         <a:font script="Hang" typeface="맑은 고딕"/>
         <a:font script="Hans" typeface="宋体"/>
         <a:font script="Hant" typeface="新細明體"/>
-        <a:font script="Arab" typeface="Christian Sans"/>
-        <a:font script="Hebr" typeface="Christian Sans"/>
+        <a:font script="Arab" typeface="Novus Serif"/>
+        <a:font script="Hebr" typeface="Novus Serif"/>
         <a:font script="Thai" typeface="Angsana New"/>
         <a:font script="Ethi" typeface="Nyala"/>
         <a:font script="Beng" typeface="Vrinda"/>
@@ -3545,20 +3545,20 @@
         <a:font script="Laoo" typeface="DokChampa"/>
         <a:font script="Sinh" typeface="Iskoola Pota"/>
         <a:font script="Mong" typeface="Mongolian Baiti"/>
-        <a:font script="Viet" typeface="Christian Sans"/>
+        <a:font script="Viet" typeface="Novus Serif"/>
         <a:font script="Uigh" typeface="Microsoft Uighur"/>
         <a:font script="Geor" typeface="Sylfaen"/>
       </a:majorFont>
       <a:minorFont>
-        <a:latin typeface="Christian Sans" panose="020F0502020204030204"/>
+        <a:latin typeface="Novus Serif" panose="020F0502020204030204"/>
         <a:ea typeface=""/>
         <a:cs typeface=""/>
         <a:font script="Jpan" typeface="ＭＳ Ｐゴシック"/>
         <a:font script="Hang" typeface="맑은 고딕"/>
         <a:font script="Hans" typeface="宋体"/>
         <a:font script="Hant" typeface="新細明體"/>
-        <a:font script="Arab" typeface="Christian Sans"/>
-        <a:font script="Hebr" typeface="Christian Sans"/>
+        <a:font script="Arab" typeface="Novus Serif"/>
+        <a:font script="Hebr" typeface="Novus Serif"/>
         <a:font script="Thai" typeface="Cordia New"/>
         <a:font script="Ethi" typeface="Nyala"/>
         <a:font script="Beng" typeface="Vrinda"/>
@@ -3580,7 +3580,7 @@
         <a:font script="Laoo" typeface="DokChampa"/>
         <a:font script="Sinh" typeface="Iskoola Pota"/>
         <a:font script="Mong" typeface="Mongolian Baiti"/>
-        <a:font script="Viet" typeface="Christian Sans"/>
+        <a:font script="Viet" typeface="Novus Serif"/>
         <a:font script="Uigh" typeface="Microsoft Uighur"/>
         <a:font script="Geor" typeface="Sylfaen"/>
       </a:minorFont>
@@ -3774,9 +3774,9 @@
         <a:srgbClr val="954F72"/>
       </a:folHlink>
     </a:clrScheme>
-    <a:fontScheme name="Christian Sans">
+    <a:fontScheme name="Novus Serif">
       <a:majorFont>
-        <a:latin typeface="Christian Sans" panose="020B0604020202020204"/>
+        <a:latin typeface="Novus Serif" panose="020B0604020202020204"/>
         <a:ea typeface=""/>
         <a:cs typeface=""/>
         <a:font script="Jpan" typeface="ＭＳ ゴシック"/>
@@ -3811,7 +3811,7 @@
         <a:font script="Geor" typeface="Sylfaen"/>
       </a:majorFont>
       <a:minorFont>
-        <a:latin typeface="Christian Sans" panose="020B0604020202020204"/>
+        <a:latin typeface="Novus Serif" panose="020B0604020202020204"/>
         <a:ea typeface=""/>
         <a:cs typeface=""/>
         <a:font script="Jpan" typeface="ＭＳ ゴシック"/>

--- a/portal/templates/blank.pptx
+++ b/portal/templates/blank.pptx
@@ -518,8 +518,8 @@
           <a:lstStyle/>
           <a:p>
             <a:endParaRPr lang="en-US" dirty="0">
-              <a:latin typeface="Novus Serif" panose="020B0604020202020204" pitchFamily="34" charset="0"/>
-              <a:cs typeface="Novus Serif" panose="020B0604020202020204" pitchFamily="34" charset="0"/>
+              <a:latin typeface="Asteria Serif" panose="020B0604020202020204" pitchFamily="34" charset="0"/>
+              <a:cs typeface="Asteria Serif" panose="020B0604020202020204" pitchFamily="34" charset="0"/>
             </a:endParaRPr>
           </a:p>
         </p:txBody>
@@ -3149,7 +3149,7 @@
         <a:spcBef>
           <a:spcPts val="1000"/>
         </a:spcBef>
-        <a:buFont typeface="Novus Serif" panose="020B0604020202020204" pitchFamily="34" charset="0"/>
+        <a:buFont typeface="Asteria Serif" panose="020B0604020202020204" pitchFamily="34" charset="0"/>
         <a:buChar char="•"/>
         <a:defRPr sz="2800" kern="1200">
           <a:solidFill>
@@ -3167,7 +3167,7 @@
         <a:spcBef>
           <a:spcPts val="500"/>
         </a:spcBef>
-        <a:buFont typeface="Novus Serif" panose="020B0604020202020204" pitchFamily="34" charset="0"/>
+        <a:buFont typeface="Asteria Serif" panose="020B0604020202020204" pitchFamily="34" charset="0"/>
         <a:buChar char="•"/>
         <a:defRPr sz="2400" kern="1200">
           <a:solidFill>
@@ -3185,7 +3185,7 @@
         <a:spcBef>
           <a:spcPts val="500"/>
         </a:spcBef>
-        <a:buFont typeface="Novus Serif" panose="020B0604020202020204" pitchFamily="34" charset="0"/>
+        <a:buFont typeface="Asteria Serif" panose="020B0604020202020204" pitchFamily="34" charset="0"/>
         <a:buChar char="•"/>
         <a:defRPr sz="2000" kern="1200">
           <a:solidFill>
@@ -3203,7 +3203,7 @@
         <a:spcBef>
           <a:spcPts val="500"/>
         </a:spcBef>
-        <a:buFont typeface="Novus Serif" panose="020B0604020202020204" pitchFamily="34" charset="0"/>
+        <a:buFont typeface="Asteria Serif" panose="020B0604020202020204" pitchFamily="34" charset="0"/>
         <a:buChar char="•"/>
         <a:defRPr sz="1800" kern="1200">
           <a:solidFill>
@@ -3221,7 +3221,7 @@
         <a:spcBef>
           <a:spcPts val="500"/>
         </a:spcBef>
-        <a:buFont typeface="Novus Serif" panose="020B0604020202020204" pitchFamily="34" charset="0"/>
+        <a:buFont typeface="Asteria Serif" panose="020B0604020202020204" pitchFamily="34" charset="0"/>
         <a:buChar char="•"/>
         <a:defRPr sz="1800" kern="1200">
           <a:solidFill>
@@ -3239,7 +3239,7 @@
         <a:spcBef>
           <a:spcPts val="500"/>
         </a:spcBef>
-        <a:buFont typeface="Novus Serif" panose="020B0604020202020204" pitchFamily="34" charset="0"/>
+        <a:buFont typeface="Asteria Serif" panose="020B0604020202020204" pitchFamily="34" charset="0"/>
         <a:buChar char="•"/>
         <a:defRPr sz="1800" kern="1200">
           <a:solidFill>
@@ -3257,7 +3257,7 @@
         <a:spcBef>
           <a:spcPts val="500"/>
         </a:spcBef>
-        <a:buFont typeface="Novus Serif" panose="020B0604020202020204" pitchFamily="34" charset="0"/>
+        <a:buFont typeface="Asteria Serif" panose="020B0604020202020204" pitchFamily="34" charset="0"/>
         <a:buChar char="•"/>
         <a:defRPr sz="1800" kern="1200">
           <a:solidFill>
@@ -3275,7 +3275,7 @@
         <a:spcBef>
           <a:spcPts val="500"/>
         </a:spcBef>
-        <a:buFont typeface="Novus Serif" panose="020B0604020202020204" pitchFamily="34" charset="0"/>
+        <a:buFont typeface="Asteria Serif" panose="020B0604020202020204" pitchFamily="34" charset="0"/>
         <a:buChar char="•"/>
         <a:defRPr sz="1800" kern="1200">
           <a:solidFill>
@@ -3293,7 +3293,7 @@
         <a:spcBef>
           <a:spcPts val="500"/>
         </a:spcBef>
-        <a:buFont typeface="Novus Serif" panose="020B0604020202020204" pitchFamily="34" charset="0"/>
+        <a:buFont typeface="Asteria Serif" panose="020B0604020202020204" pitchFamily="34" charset="0"/>
         <a:buChar char="•"/>
         <a:defRPr sz="1800" kern="1200">
           <a:solidFill>
@@ -3515,15 +3515,15 @@
     </a:clrScheme>
     <a:fontScheme name="Office Theme">
       <a:majorFont>
-        <a:latin typeface="Novus Serif" panose="020F0302020204030204"/>
+        <a:latin typeface="Asteria Serif" panose="020F0302020204030204"/>
         <a:ea typeface=""/>
         <a:cs typeface=""/>
         <a:font script="Jpan" typeface="ＭＳ Ｐゴシック"/>
         <a:font script="Hang" typeface="맑은 고딕"/>
         <a:font script="Hans" typeface="宋体"/>
         <a:font script="Hant" typeface="新細明體"/>
-        <a:font script="Arab" typeface="Novus Serif"/>
-        <a:font script="Hebr" typeface="Novus Serif"/>
+        <a:font script="Arab" typeface="Asteria Serif"/>
+        <a:font script="Hebr" typeface="Asteria Serif"/>
         <a:font script="Thai" typeface="Angsana New"/>
         <a:font script="Ethi" typeface="Nyala"/>
         <a:font script="Beng" typeface="Vrinda"/>
@@ -3545,20 +3545,20 @@
         <a:font script="Laoo" typeface="DokChampa"/>
         <a:font script="Sinh" typeface="Iskoola Pota"/>
         <a:font script="Mong" typeface="Mongolian Baiti"/>
-        <a:font script="Viet" typeface="Novus Serif"/>
+        <a:font script="Viet" typeface="Asteria Serif"/>
         <a:font script="Uigh" typeface="Microsoft Uighur"/>
         <a:font script="Geor" typeface="Sylfaen"/>
       </a:majorFont>
       <a:minorFont>
-        <a:latin typeface="Novus Serif" panose="020F0502020204030204"/>
+        <a:latin typeface="Asteria Serif" panose="020F0502020204030204"/>
         <a:ea typeface=""/>
         <a:cs typeface=""/>
         <a:font script="Jpan" typeface="ＭＳ Ｐゴシック"/>
         <a:font script="Hang" typeface="맑은 고딕"/>
         <a:font script="Hans" typeface="宋体"/>
         <a:font script="Hant" typeface="新細明體"/>
-        <a:font script="Arab" typeface="Novus Serif"/>
-        <a:font script="Hebr" typeface="Novus Serif"/>
+        <a:font script="Arab" typeface="Asteria Serif"/>
+        <a:font script="Hebr" typeface="Asteria Serif"/>
         <a:font script="Thai" typeface="Cordia New"/>
         <a:font script="Ethi" typeface="Nyala"/>
         <a:font script="Beng" typeface="Vrinda"/>
@@ -3580,7 +3580,7 @@
         <a:font script="Laoo" typeface="DokChampa"/>
         <a:font script="Sinh" typeface="Iskoola Pota"/>
         <a:font script="Mong" typeface="Mongolian Baiti"/>
-        <a:font script="Viet" typeface="Novus Serif"/>
+        <a:font script="Viet" typeface="Asteria Serif"/>
         <a:font script="Uigh" typeface="Microsoft Uighur"/>
         <a:font script="Geor" typeface="Sylfaen"/>
       </a:minorFont>
@@ -3774,9 +3774,9 @@
         <a:srgbClr val="954F72"/>
       </a:folHlink>
     </a:clrScheme>
-    <a:fontScheme name="Novus Serif">
+    <a:fontScheme name="Asteria Serif">
       <a:majorFont>
-        <a:latin typeface="Novus Serif" panose="020B0604020202020204"/>
+        <a:latin typeface="Asteria Serif" panose="020B0604020202020204"/>
         <a:ea typeface=""/>
         <a:cs typeface=""/>
         <a:font script="Jpan" typeface="ＭＳ ゴシック"/>
@@ -3811,7 +3811,7 @@
         <a:font script="Geor" typeface="Sylfaen"/>
       </a:majorFont>
       <a:minorFont>
-        <a:latin typeface="Novus Serif" panose="020B0604020202020204"/>
+        <a:latin typeface="Asteria Serif" panose="020B0604020202020204"/>
         <a:ea typeface=""/>
         <a:cs typeface=""/>
         <a:font script="Jpan" typeface="ＭＳ ゴシック"/>
